--- a/modulo-01/01.01 - Iniciando a Jornada/01.01_Iniciando_a_jornada_no_ABAP_moderno.pptx
+++ b/modulo-01/01.01 - Iniciando a Jornada/01.01_Iniciando_a_jornada_no_ABAP_moderno.pptx
@@ -4114,7 +4114,7 @@
         </p:blipFill>
         <p:spPr>
           <a:xfrm>
-            <a:off x="850392" y="2661412"/>
+            <a:off x="4624730" y="2661412"/>
             <a:ext cx="256032" cy="256032"/>
           </a:xfrm>
           <a:prstGeom prst="rect">
@@ -4138,7 +4138,7 @@
         </p:blipFill>
         <p:spPr>
           <a:xfrm>
-            <a:off x="4624730" y="2661412"/>
+            <a:off x="850392" y="2661412"/>
             <a:ext cx="256032" cy="256032"/>
           </a:xfrm>
           <a:prstGeom prst="rect">
@@ -7093,7 +7093,7 @@
         </p:blipFill>
         <p:spPr>
           <a:xfrm>
-            <a:off x="1598257" y="2084832"/>
+            <a:off x="4474731" y="2084832"/>
             <a:ext cx="365760" cy="365760"/>
           </a:xfrm>
           <a:prstGeom prst="rect">
@@ -7117,8 +7117,8 @@
         </p:blipFill>
         <p:spPr>
           <a:xfrm>
-            <a:off x="4474731" y="2084832"/>
-            <a:ext cx="365760" cy="365760"/>
+            <a:off x="8368711" y="3928994"/>
+            <a:ext cx="225308" cy="225308"/>
           </a:xfrm>
           <a:prstGeom prst="rect">
             <a:avLst/>
@@ -7141,7 +7141,7 @@
         </p:blipFill>
         <p:spPr>
           <a:xfrm>
-            <a:off x="7351205" y="2084832"/>
+            <a:off x="1598257" y="2084832"/>
             <a:ext cx="365760" cy="365760"/>
           </a:xfrm>
           <a:prstGeom prst="rect">
@@ -7165,8 +7165,8 @@
         </p:blipFill>
         <p:spPr>
           <a:xfrm>
-            <a:off x="820034" y="3928994"/>
-            <a:ext cx="225308" cy="225308"/>
+            <a:off x="7351205" y="2084832"/>
+            <a:ext cx="365760" cy="365760"/>
           </a:xfrm>
           <a:prstGeom prst="rect">
             <a:avLst/>
@@ -7189,8 +7189,8 @@
         </p:blipFill>
         <p:spPr>
           <a:xfrm>
-            <a:off x="4594372" y="3928994"/>
-            <a:ext cx="225308" cy="225308"/>
+            <a:off x="10227678" y="2084832"/>
+            <a:ext cx="365760" cy="365760"/>
           </a:xfrm>
           <a:prstGeom prst="rect">
             <a:avLst/>
@@ -7213,8 +7213,8 @@
         </p:blipFill>
         <p:spPr>
           <a:xfrm>
-            <a:off x="10227678" y="2084832"/>
-            <a:ext cx="365760" cy="365760"/>
+            <a:off x="820034" y="3928994"/>
+            <a:ext cx="225308" cy="225308"/>
           </a:xfrm>
           <a:prstGeom prst="rect">
             <a:avLst/>
@@ -7237,7 +7237,7 @@
         </p:blipFill>
         <p:spPr>
           <a:xfrm>
-            <a:off x="8368711" y="3928994"/>
+            <a:off x="4594372" y="3928994"/>
             <a:ext cx="225308" cy="225308"/>
           </a:xfrm>
           <a:prstGeom prst="rect">
@@ -8227,7 +8227,7 @@
         </p:blipFill>
         <p:spPr>
           <a:xfrm>
-            <a:off x="2057949" y="3118104"/>
+            <a:off x="6576182" y="3118104"/>
             <a:ext cx="329184" cy="329184"/>
           </a:xfrm>
           <a:prstGeom prst="rect">
@@ -8251,7 +8251,7 @@
         </p:blipFill>
         <p:spPr>
           <a:xfrm>
-            <a:off x="4317065" y="3118104"/>
+            <a:off x="8835299" y="3118104"/>
             <a:ext cx="329184" cy="329184"/>
           </a:xfrm>
           <a:prstGeom prst="rect">
@@ -8275,8 +8275,8 @@
         </p:blipFill>
         <p:spPr>
           <a:xfrm>
-            <a:off x="6576182" y="3118104"/>
-            <a:ext cx="329184" cy="329184"/>
+            <a:off x="749808" y="5285232"/>
+            <a:ext cx="310896" cy="310896"/>
           </a:xfrm>
           <a:prstGeom prst="rect">
             <a:avLst/>
@@ -8299,7 +8299,7 @@
         </p:blipFill>
         <p:spPr>
           <a:xfrm>
-            <a:off x="8835299" y="3118104"/>
+            <a:off x="2057949" y="3118104"/>
             <a:ext cx="329184" cy="329184"/>
           </a:xfrm>
           <a:prstGeom prst="rect">
@@ -8323,7 +8323,7 @@
         </p:blipFill>
         <p:spPr>
           <a:xfrm>
-            <a:off x="11094415" y="3118104"/>
+            <a:off x="4317065" y="3118104"/>
             <a:ext cx="329184" cy="329184"/>
           </a:xfrm>
           <a:prstGeom prst="rect">
@@ -8347,8 +8347,8 @@
         </p:blipFill>
         <p:spPr>
           <a:xfrm>
-            <a:off x="749808" y="5285232"/>
-            <a:ext cx="310896" cy="310896"/>
+            <a:off x="11094415" y="3118104"/>
+            <a:ext cx="329184" cy="329184"/>
           </a:xfrm>
           <a:prstGeom prst="rect">
             <a:avLst/>
@@ -12001,7 +12001,7 @@
         </p:blipFill>
         <p:spPr>
           <a:xfrm>
-            <a:off x="4317065" y="3525012"/>
+            <a:off x="6576182" y="3525012"/>
             <a:ext cx="329184" cy="329184"/>
           </a:xfrm>
           <a:prstGeom prst="rect">
@@ -12025,7 +12025,7 @@
         </p:blipFill>
         <p:spPr>
           <a:xfrm>
-            <a:off x="6576182" y="3525012"/>
+            <a:off x="4317065" y="3525012"/>
             <a:ext cx="329184" cy="329184"/>
           </a:xfrm>
           <a:prstGeom prst="rect">
@@ -12049,7 +12049,7 @@
         </p:blipFill>
         <p:spPr>
           <a:xfrm>
-            <a:off x="8835299" y="3525012"/>
+            <a:off x="11094415" y="3525012"/>
             <a:ext cx="329184" cy="329184"/>
           </a:xfrm>
           <a:prstGeom prst="rect">
@@ -12073,7 +12073,7 @@
         </p:blipFill>
         <p:spPr>
           <a:xfrm>
-            <a:off x="11094415" y="3525012"/>
+            <a:off x="8835299" y="3525012"/>
             <a:ext cx="329184" cy="329184"/>
           </a:xfrm>
           <a:prstGeom prst="rect">
@@ -13237,7 +13237,7 @@
         </p:blipFill>
         <p:spPr>
           <a:xfrm>
-            <a:off x="3681146" y="2557272"/>
+            <a:off x="850392" y="2557272"/>
             <a:ext cx="256032" cy="256032"/>
           </a:xfrm>
           <a:prstGeom prst="rect">
@@ -13261,7 +13261,7 @@
         </p:blipFill>
         <p:spPr>
           <a:xfrm>
-            <a:off x="850392" y="2557272"/>
+            <a:off x="3681146" y="2557272"/>
             <a:ext cx="256032" cy="256032"/>
           </a:xfrm>
           <a:prstGeom prst="rect">
@@ -13309,8 +13309,8 @@
         </p:blipFill>
         <p:spPr>
           <a:xfrm>
-            <a:off x="9342653" y="2557272"/>
-            <a:ext cx="256032" cy="256032"/>
+            <a:off x="749808" y="5123688"/>
+            <a:ext cx="310896" cy="310896"/>
           </a:xfrm>
           <a:prstGeom prst="rect">
             <a:avLst/>
@@ -13333,8 +13333,8 @@
         </p:blipFill>
         <p:spPr>
           <a:xfrm>
-            <a:off x="749808" y="5123688"/>
-            <a:ext cx="310896" cy="310896"/>
+            <a:off x="9342653" y="2557272"/>
+            <a:ext cx="256032" cy="256032"/>
           </a:xfrm>
           <a:prstGeom prst="rect">
             <a:avLst/>
@@ -14995,7 +14995,7 @@
         </p:blipFill>
         <p:spPr>
           <a:xfrm>
-            <a:off x="11094415" y="1847088"/>
+            <a:off x="2636444" y="3858768"/>
             <a:ext cx="347472" cy="347472"/>
           </a:xfrm>
           <a:prstGeom prst="rect">
@@ -15019,7 +15019,7 @@
         </p:blipFill>
         <p:spPr>
           <a:xfrm>
-            <a:off x="2636444" y="3858768"/>
+            <a:off x="5455768" y="3858768"/>
             <a:ext cx="347472" cy="347472"/>
           </a:xfrm>
           <a:prstGeom prst="rect">
@@ -15043,7 +15043,7 @@
         </p:blipFill>
         <p:spPr>
           <a:xfrm>
-            <a:off x="5455768" y="3858768"/>
+            <a:off x="11094415" y="1847088"/>
             <a:ext cx="347472" cy="347472"/>
           </a:xfrm>
           <a:prstGeom prst="rect">
@@ -15840,7 +15840,7 @@
         </p:blipFill>
         <p:spPr>
           <a:xfrm>
-            <a:off x="822960" y="1965960"/>
+            <a:off x="6355080" y="1965960"/>
             <a:ext cx="256032" cy="256032"/>
           </a:xfrm>
           <a:prstGeom prst="rect">
@@ -15864,7 +15864,7 @@
         </p:blipFill>
         <p:spPr>
           <a:xfrm>
-            <a:off x="6355080" y="1965960"/>
+            <a:off x="822960" y="1965960"/>
             <a:ext cx="256032" cy="256032"/>
           </a:xfrm>
           <a:prstGeom prst="rect">
@@ -15888,7 +15888,7 @@
         </p:blipFill>
         <p:spPr>
           <a:xfrm>
-            <a:off x="822960" y="2926080"/>
+            <a:off x="6355080" y="2926080"/>
             <a:ext cx="256032" cy="256032"/>
           </a:xfrm>
           <a:prstGeom prst="rect">
@@ -15912,7 +15912,7 @@
         </p:blipFill>
         <p:spPr>
           <a:xfrm>
-            <a:off x="6355080" y="2926080"/>
+            <a:off x="822960" y="2926080"/>
             <a:ext cx="256032" cy="256032"/>
           </a:xfrm>
           <a:prstGeom prst="rect">
@@ -18284,8 +18284,8 @@
         </p:blipFill>
         <p:spPr>
           <a:xfrm>
-            <a:off x="850392" y="2661412"/>
-            <a:ext cx="256032" cy="256032"/>
+            <a:off x="749808" y="5019548"/>
+            <a:ext cx="310896" cy="310896"/>
           </a:xfrm>
           <a:prstGeom prst="rect">
             <a:avLst/>
@@ -18308,7 +18308,7 @@
         </p:blipFill>
         <p:spPr>
           <a:xfrm>
-            <a:off x="4624730" y="2661412"/>
+            <a:off x="850392" y="2661412"/>
             <a:ext cx="256032" cy="256032"/>
           </a:xfrm>
           <a:prstGeom prst="rect">
@@ -18332,7 +18332,7 @@
         </p:blipFill>
         <p:spPr>
           <a:xfrm>
-            <a:off x="8399069" y="2661412"/>
+            <a:off x="4624730" y="2661412"/>
             <a:ext cx="256032" cy="256032"/>
           </a:xfrm>
           <a:prstGeom prst="rect">
@@ -18356,8 +18356,8 @@
         </p:blipFill>
         <p:spPr>
           <a:xfrm>
-            <a:off x="749808" y="5019548"/>
-            <a:ext cx="310896" cy="310896"/>
+            <a:off x="8399069" y="2661412"/>
+            <a:ext cx="256032" cy="256032"/>
           </a:xfrm>
           <a:prstGeom prst="rect">
             <a:avLst/>
@@ -19188,7 +19188,7 @@
         </p:blipFill>
         <p:spPr>
           <a:xfrm>
-            <a:off x="7351205" y="2084832"/>
+            <a:off x="10227678" y="2084832"/>
             <a:ext cx="365760" cy="365760"/>
           </a:xfrm>
           <a:prstGeom prst="rect">
@@ -19212,8 +19212,8 @@
         </p:blipFill>
         <p:spPr>
           <a:xfrm>
-            <a:off x="4474731" y="2084832"/>
-            <a:ext cx="365760" cy="365760"/>
+            <a:off x="820034" y="3928994"/>
+            <a:ext cx="225308" cy="225308"/>
           </a:xfrm>
           <a:prstGeom prst="rect">
             <a:avLst/>
@@ -19236,7 +19236,7 @@
         </p:blipFill>
         <p:spPr>
           <a:xfrm>
-            <a:off x="1598257" y="2084832"/>
+            <a:off x="4474731" y="2084832"/>
             <a:ext cx="365760" cy="365760"/>
           </a:xfrm>
           <a:prstGeom prst="rect">
@@ -19260,7 +19260,7 @@
         </p:blipFill>
         <p:spPr>
           <a:xfrm>
-            <a:off x="10227678" y="2084832"/>
+            <a:off x="7351205" y="2084832"/>
             <a:ext cx="365760" cy="365760"/>
           </a:xfrm>
           <a:prstGeom prst="rect">
@@ -19284,7 +19284,7 @@
         </p:blipFill>
         <p:spPr>
           <a:xfrm>
-            <a:off x="820034" y="3928994"/>
+            <a:off x="6481542" y="3928994"/>
             <a:ext cx="225308" cy="225308"/>
           </a:xfrm>
           <a:prstGeom prst="rect">
@@ -19308,8 +19308,8 @@
         </p:blipFill>
         <p:spPr>
           <a:xfrm>
-            <a:off x="6481542" y="3928994"/>
-            <a:ext cx="225308" cy="225308"/>
+            <a:off x="1598257" y="2084832"/>
+            <a:ext cx="365760" cy="365760"/>
           </a:xfrm>
           <a:prstGeom prst="rect">
             <a:avLst/>
@@ -21969,7 +21969,7 @@
         </p:blipFill>
         <p:spPr>
           <a:xfrm>
-            <a:off x="877824" y="2674334"/>
+            <a:off x="6562192" y="2674334"/>
             <a:ext cx="256032" cy="256032"/>
           </a:xfrm>
           <a:prstGeom prst="rect">
@@ -21993,7 +21993,7 @@
         </p:blipFill>
         <p:spPr>
           <a:xfrm>
-            <a:off x="6562192" y="2674334"/>
+            <a:off x="877824" y="2674334"/>
             <a:ext cx="256032" cy="256032"/>
           </a:xfrm>
           <a:prstGeom prst="rect">
